--- a/docs/project-overview.pptx
+++ b/docs/project-overview.pptx
@@ -1729,7 +1729,7 @@
                   <a:srgbClr val="F5F5F4"/>
                 </a:solidFill>
               </a:rPr>
-              <a:t>Khaled Omar Bahidilh</a:t>
+              <a:t>KHALID BAHADILAH</a:t>
             </a:r>
           </a:p>
         </p:txBody>
